--- a/10-plantas/01-steelmaking/05-capacitacion/MO-OLL-01/MO-OLL-01_Capacitacion_AMMX.pptx
+++ b/10-plantas/01-steelmaking/05-capacitacion/MO-OLL-01/MO-OLL-01_Capacitacion_AMMX.pptx
@@ -1953,7 +1953,7 @@
               <a:rPr lang="en-US" dirty="0"/>
               <a:t>CÓMO EXPLICARLA: Leer cada renglón: objetivo, rango normal, alarma y la acción (columna resaltada).
 PUNTOS A CERRAR: Ejercicio: dar un valor fuera de rango y pedir la acción correcta.
-[POR CONFIRMAR] Olla nueva o revestida: curva completa, típico 24–48 h [Validar con OEM / Ingeniería de Proceso]. Barril ≥ 40 mm [Supuesto]; placas 2–5 coladas [Validar con OEM].</a:t>
+[POR CONFIRMAR] Olla nueva: curva completa, típico 24–48 h [Validar con OEM / Ingeniería de Proceso]. Barril ≥ 40 mm [Supuesto]; placas 2–5 coladas [Validar con OEM].</a:t>
             </a:r>
             <a:endParaRPr lang="en-US" dirty="0"/>
           </a:p>
@@ -15116,7 +15116,7 @@
                           <a:ea typeface="Century Gothic" pitchFamily="34" charset="-122"/>
                           <a:cs typeface="Century Gothic" pitchFamily="34" charset="-120"/>
                         </a:rPr>
-                        <a:t>24 meses; olla 12</a:t>
+                        <a:t>24 meses; confinado 12</a:t>
                       </a:r>
                       <a:endParaRPr lang="en-US" sz="950" dirty="0">
                         <a:latin typeface="Century Gothic" charset="0"/>
@@ -18802,7 +18802,7 @@
                 <a:ea typeface="Calibri" pitchFamily="34" charset="-122"/>
                 <a:cs typeface="Calibri" pitchFamily="34" charset="-120"/>
               </a:rPr>
-              <a:t>Siguiente paso: OJT supervisado y evaluación práctica (TD-P07); registro en IMaS y DC-3/SIRCE. Validación: visto bueno técnica (pendientes: seguridad, laboral, diseño instruccional).</a:t>
+              <a:t>Siguiente paso: OJT supervisado y evaluación práctica (TD-P07); registro en IMaS y DC-3/SIRCE. Validación: visto bueno técnica, seguridad, laboral, diseño instruccional.</a:t>
             </a:r>
             <a:endParaRPr lang="en-US" sz="750" dirty="0"/>
           </a:p>
@@ -29887,7 +29887,7 @@
                 <a:ea typeface="Century Gothic" pitchFamily="34" charset="-122"/>
                 <a:cs typeface="Century Gothic" pitchFamily="34" charset="-120"/>
               </a:rPr>
-              <a:t>Olla nueva o revestida: curva completa, típico 24–48 h [Validar con OEM / Ingeniería de Proceso]. Barril ≥ 40 mm [Supuesto]; placas 2–5 coladas [Validar con OEM].</a:t>
+              <a:t>Olla nueva: curva completa, típico 24–48 h [Validar con OEM / Ingeniería de Proceso]. Barril ≥ 40 mm [Supuesto]; placas 2–5 coladas [Validar con OEM].</a:t>
             </a:r>
             <a:endParaRPr lang="en-US" sz="950" dirty="0"/>
           </a:p>
